--- a/slides/1_mlflow/what_is_mlops.pptx
+++ b/slides/1_mlflow/what_is_mlops.pptx
@@ -11,9 +11,9 @@
     <p:sldId id="256" r:id="rId2"/>
     <p:sldId id="287" r:id="rId3"/>
     <p:sldId id="278" r:id="rId4"/>
-    <p:sldId id="281" r:id="rId5"/>
-    <p:sldId id="279" r:id="rId6"/>
-    <p:sldId id="280" r:id="rId7"/>
+    <p:sldId id="279" r:id="rId5"/>
+    <p:sldId id="280" r:id="rId6"/>
+    <p:sldId id="281" r:id="rId7"/>
     <p:sldId id="283" r:id="rId8"/>
     <p:sldId id="285" r:id="rId9"/>
     <p:sldId id="289" r:id="rId10"/>
@@ -212,7 +212,7 @@
           <a:p>
             <a:fld id="{68F33786-69FA-47D8-964E-2BB12BEAF6E1}" type="datetimeFigureOut">
               <a:rPr lang="fr-FR" smtClean="0"/>
-              <a:t>09/03/2025</a:t>
+              <a:t>12/05/2025</a:t>
             </a:fld>
             <a:endParaRPr lang="fr-FR"/>
           </a:p>
@@ -13665,8 +13665,8 @@
         </p:blipFill>
         <p:spPr bwMode="auto">
           <a:xfrm>
-            <a:off x="2826548" y="1247631"/>
-            <a:ext cx="6714751" cy="4795074"/>
+            <a:off x="2359597" y="1332195"/>
+            <a:ext cx="7457666" cy="4795074"/>
           </a:xfrm>
           <a:prstGeom prst="rect">
             <a:avLst/>
@@ -15182,317 +15182,6 @@
       </p:grpSpPr>
       <p:pic>
         <p:nvPicPr>
-          <p:cNvPr id="6" name="Image 5"/>
-          <p:cNvPicPr>
-            <a:picLocks noChangeAspect="1"/>
-          </p:cNvPicPr>
-          <p:nvPr/>
-        </p:nvPicPr>
-        <p:blipFill>
-          <a:blip r:embed="rId2"/>
-          <a:stretch>
-            <a:fillRect/>
-          </a:stretch>
-        </p:blipFill>
-        <p:spPr>
-          <a:xfrm>
-            <a:off x="1652787" y="3377613"/>
-            <a:ext cx="8774238" cy="2388717"/>
-          </a:xfrm>
-          <a:prstGeom prst="rect">
-            <a:avLst/>
-          </a:prstGeom>
-        </p:spPr>
-      </p:pic>
-      <p:sp>
-        <p:nvSpPr>
-          <p:cNvPr id="2" name="Titre 1"/>
-          <p:cNvSpPr>
-            <a:spLocks noGrp="1"/>
-          </p:cNvSpPr>
-          <p:nvPr>
-            <p:ph type="title"/>
-          </p:nvPr>
-        </p:nvSpPr>
-        <p:spPr/>
-        <p:txBody>
-          <a:bodyPr/>
-          <a:lstStyle/>
-          <a:p>
-            <a:r>
-              <a:rPr lang="fr-FR" dirty="0" err="1" smtClean="0"/>
-              <a:t>Why</a:t>
-            </a:r>
-            <a:r>
-              <a:rPr lang="fr-FR" dirty="0" smtClean="0"/>
-              <a:t> </a:t>
-            </a:r>
-            <a:r>
-              <a:rPr lang="fr-FR" dirty="0" err="1" smtClean="0"/>
-              <a:t>is</a:t>
-            </a:r>
-            <a:r>
-              <a:rPr lang="fr-FR" dirty="0" smtClean="0"/>
-              <a:t> </a:t>
-            </a:r>
-            <a:r>
-              <a:rPr lang="fr-FR" dirty="0" err="1" smtClean="0"/>
-              <a:t>MLOps</a:t>
-            </a:r>
-            <a:r>
-              <a:rPr lang="fr-FR" dirty="0" smtClean="0"/>
-              <a:t> </a:t>
-            </a:r>
-            <a:r>
-              <a:rPr lang="fr-FR" dirty="0" err="1" smtClean="0"/>
-              <a:t>getting</a:t>
-            </a:r>
-            <a:r>
-              <a:rPr lang="fr-FR" dirty="0" smtClean="0"/>
-              <a:t> more and more important ?</a:t>
-            </a:r>
-            <a:endParaRPr lang="fr-FR" dirty="0"/>
-          </a:p>
-        </p:txBody>
-      </p:sp>
-      <p:sp>
-        <p:nvSpPr>
-          <p:cNvPr id="3" name="Espace réservé du texte 2"/>
-          <p:cNvSpPr>
-            <a:spLocks noGrp="1"/>
-          </p:cNvSpPr>
-          <p:nvPr>
-            <p:ph type="body" sz="quarter" idx="14"/>
-          </p:nvPr>
-        </p:nvSpPr>
-        <p:spPr>
-          <a:xfrm>
-            <a:off x="471288" y="1496119"/>
-            <a:ext cx="11137237" cy="4467225"/>
-          </a:xfrm>
-        </p:spPr>
-        <p:txBody>
-          <a:bodyPr/>
-          <a:lstStyle/>
-          <a:p>
-            <a:pPr marL="0" indent="0">
-              <a:buNone/>
-            </a:pPr>
-            <a:r>
-              <a:rPr lang="en-US" b="1" dirty="0"/>
-              <a:t>The benefits of AI </a:t>
-            </a:r>
-            <a:r>
-              <a:rPr lang="en-US" dirty="0"/>
-              <a:t>and ML </a:t>
-            </a:r>
-            <a:r>
-              <a:rPr lang="en-US" b="1" dirty="0"/>
-              <a:t>no longer need to be proven</a:t>
-            </a:r>
-            <a:r>
-              <a:rPr lang="en-US" dirty="0"/>
-              <a:t>, especially </a:t>
-            </a:r>
-            <a:r>
-              <a:rPr lang="en-US" b="1" dirty="0"/>
-              <a:t>with the boom of Generative AI</a:t>
-            </a:r>
-            <a:r>
-              <a:rPr lang="en-US" dirty="0"/>
-              <a:t>. The launch of </a:t>
-            </a:r>
-            <a:r>
-              <a:rPr lang="en-US" dirty="0" err="1"/>
-              <a:t>ChatGPT</a:t>
-            </a:r>
-            <a:r>
-              <a:rPr lang="en-US" dirty="0"/>
-              <a:t> in November 2022 has made the public understand, perhaps for the first time, the potential of </a:t>
-            </a:r>
-            <a:r>
-              <a:rPr lang="en-US" dirty="0" smtClean="0"/>
-              <a:t>AI</a:t>
-            </a:r>
-            <a:r>
-              <a:rPr lang="en-US" dirty="0"/>
-              <a:t/>
-            </a:r>
-            <a:br>
-              <a:rPr lang="en-US" dirty="0"/>
-            </a:br>
-            <a:r>
-              <a:rPr lang="en-US" dirty="0"/>
-              <a:t/>
-            </a:r>
-            <a:br>
-              <a:rPr lang="en-US" dirty="0"/>
-            </a:br>
-            <a:r>
-              <a:rPr lang="en-US" dirty="0" smtClean="0">
-                <a:sym typeface="Wingdings" panose="05000000000000000000" pitchFamily="2" charset="2"/>
-              </a:rPr>
-              <a:t> </a:t>
-            </a:r>
-            <a:r>
-              <a:rPr lang="en-US" dirty="0" smtClean="0"/>
-              <a:t>Companies </a:t>
-            </a:r>
-            <a:r>
-              <a:rPr lang="en-US" dirty="0"/>
-              <a:t>want to </a:t>
-            </a:r>
-            <a:r>
-              <a:rPr lang="en-US" b="1" dirty="0"/>
-              <a:t>move AI solutions from the POC (Proof of Concept) stage to the production </a:t>
-            </a:r>
-            <a:r>
-              <a:rPr lang="en-US" b="1" dirty="0" smtClean="0"/>
-              <a:t>stage</a:t>
-            </a:r>
-            <a:r>
-              <a:rPr lang="en-US" b="1" dirty="0"/>
-              <a:t/>
-            </a:r>
-            <a:br>
-              <a:rPr lang="en-US" b="1" dirty="0"/>
-            </a:br>
-            <a:r>
-              <a:rPr lang="en-US" dirty="0"/>
-              <a:t/>
-            </a:r>
-            <a:br>
-              <a:rPr lang="en-US" dirty="0"/>
-            </a:br>
-            <a:r>
-              <a:rPr lang="en-US" dirty="0"/>
-              <a:t>Below is the trend of searches for the "</a:t>
-            </a:r>
-            <a:r>
-              <a:rPr lang="en-US" dirty="0" err="1"/>
-              <a:t>MLOps</a:t>
-            </a:r>
-            <a:r>
-              <a:rPr lang="en-US" dirty="0"/>
-              <a:t>" keyword on </a:t>
-            </a:r>
-            <a:r>
-              <a:rPr lang="en-US" dirty="0" smtClean="0"/>
-              <a:t>Google</a:t>
-            </a:r>
-            <a:endParaRPr lang="fr-FR" dirty="0" smtClean="0"/>
-          </a:p>
-        </p:txBody>
-      </p:sp>
-      <p:sp>
-        <p:nvSpPr>
-          <p:cNvPr id="4" name="Espace réservé du numéro de diapositive 3"/>
-          <p:cNvSpPr>
-            <a:spLocks noGrp="1"/>
-          </p:cNvSpPr>
-          <p:nvPr>
-            <p:ph type="sldNum" sz="quarter" idx="4"/>
-          </p:nvPr>
-        </p:nvSpPr>
-        <p:spPr/>
-        <p:txBody>
-          <a:bodyPr/>
-          <a:lstStyle/>
-          <a:p>
-            <a:pPr>
-              <a:defRPr/>
-            </a:pPr>
-            <a:fld id="{F4FEB08F-923E-484A-9FC5-0AA7BDA29BD6}" type="slidenum">
-              <a:rPr lang="fr-FR" smtClean="0"/>
-              <a:pPr>
-                <a:defRPr/>
-              </a:pPr>
-              <a:t>4</a:t>
-            </a:fld>
-            <a:endParaRPr lang="fr-FR" dirty="0"/>
-          </a:p>
-        </p:txBody>
-      </p:sp>
-      <p:sp>
-        <p:nvSpPr>
-          <p:cNvPr id="7" name="Espace réservé du pied de page 4"/>
-          <p:cNvSpPr>
-            <a:spLocks noGrp="1"/>
-          </p:cNvSpPr>
-          <p:nvPr>
-            <p:ph type="ftr" sz="quarter" idx="3"/>
-          </p:nvPr>
-        </p:nvSpPr>
-        <p:spPr>
-          <a:xfrm>
-            <a:off x="511908" y="6406728"/>
-            <a:ext cx="5672016" cy="365125"/>
-          </a:xfrm>
-        </p:spPr>
-        <p:txBody>
-          <a:bodyPr/>
-          <a:lstStyle/>
-          <a:p>
-            <a:r>
-              <a:rPr lang="fr-FR" dirty="0" smtClean="0"/>
-              <a:t>2025 | ©</a:t>
-            </a:r>
-            <a:r>
-              <a:rPr lang="fr-FR" dirty="0" err="1" smtClean="0"/>
-              <a:t>HeadMind</a:t>
-            </a:r>
-            <a:r>
-              <a:rPr lang="fr-FR" dirty="0" smtClean="0"/>
-              <a:t> </a:t>
-            </a:r>
-            <a:r>
-              <a:rPr lang="fr-FR" dirty="0" err="1" smtClean="0"/>
-              <a:t>Partners</a:t>
-            </a:r>
-            <a:r>
-              <a:rPr lang="fr-FR" dirty="0" smtClean="0"/>
-              <a:t> AI &amp; </a:t>
-            </a:r>
-            <a:r>
-              <a:rPr lang="fr-FR" dirty="0" err="1" smtClean="0"/>
-              <a:t>Blockchain</a:t>
-            </a:r>
-            <a:endParaRPr lang="fr-FR" dirty="0"/>
-          </a:p>
-        </p:txBody>
-      </p:sp>
-    </p:spTree>
-    <p:extLst>
-      <p:ext uri="{BB962C8B-B14F-4D97-AF65-F5344CB8AC3E}">
-        <p14:creationId xmlns:p14="http://schemas.microsoft.com/office/powerpoint/2010/main" val="1061338067"/>
-      </p:ext>
-    </p:extLst>
-  </p:cSld>
-  <p:clrMapOvr>
-    <a:masterClrMapping/>
-  </p:clrMapOvr>
-</p:sld>
-</file>
-
-<file path=ppt/slides/slide5.xml><?xml version="1.0" encoding="utf-8"?>
-<p:sld xmlns:a="http://schemas.openxmlformats.org/drawingml/2006/main" xmlns:r="http://schemas.openxmlformats.org/officeDocument/2006/relationships" xmlns:p="http://schemas.openxmlformats.org/presentationml/2006/main">
-  <p:cSld>
-    <p:spTree>
-      <p:nvGrpSpPr>
-        <p:cNvPr id="1" name=""/>
-        <p:cNvGrpSpPr/>
-        <p:nvPr/>
-      </p:nvGrpSpPr>
-      <p:grpSpPr>
-        <a:xfrm>
-          <a:off x="0" y="0"/>
-          <a:ext cx="0" cy="0"/>
-          <a:chOff x="0" y="0"/>
-          <a:chExt cx="0" cy="0"/>
-        </a:xfrm>
-      </p:grpSpPr>
-      <p:pic>
-        <p:nvPicPr>
           <p:cNvPr id="7" name="Picture 2" descr="DevOpsを加速させるソフトウェア開発高速化ツールとは？ | INSIGHT HUB"/>
           <p:cNvPicPr>
             <a:picLocks noChangeAspect="1" noChangeArrowheads="1"/>
@@ -15823,7 +15512,7 @@
               <a:pPr>
                 <a:defRPr/>
               </a:pPr>
-              <a:t>5</a:t>
+              <a:t>4</a:t>
             </a:fld>
             <a:endParaRPr lang="fr-FR" dirty="0"/>
           </a:p>
@@ -15929,7 +15618,7 @@
 </p:sld>
 </file>
 
-<file path=ppt/slides/slide6.xml><?xml version="1.0" encoding="utf-8"?>
+<file path=ppt/slides/slide5.xml><?xml version="1.0" encoding="utf-8"?>
 <p:sld xmlns:a="http://schemas.openxmlformats.org/drawingml/2006/main" xmlns:r="http://schemas.openxmlformats.org/officeDocument/2006/relationships" xmlns:p="http://schemas.openxmlformats.org/presentationml/2006/main">
   <p:cSld>
     <p:spTree>
@@ -16215,7 +15904,7 @@
               <a:pPr>
                 <a:defRPr/>
               </a:pPr>
-              <a:t>6</a:t>
+              <a:t>5</a:t>
             </a:fld>
             <a:endParaRPr lang="fr-FR" dirty="0"/>
           </a:p>
@@ -16273,6 +15962,317 @@
     <p:extLst>
       <p:ext uri="{BB962C8B-B14F-4D97-AF65-F5344CB8AC3E}">
         <p14:creationId xmlns:p14="http://schemas.microsoft.com/office/powerpoint/2010/main" val="2079302397"/>
+      </p:ext>
+    </p:extLst>
+  </p:cSld>
+  <p:clrMapOvr>
+    <a:masterClrMapping/>
+  </p:clrMapOvr>
+</p:sld>
+</file>
+
+<file path=ppt/slides/slide6.xml><?xml version="1.0" encoding="utf-8"?>
+<p:sld xmlns:a="http://schemas.openxmlformats.org/drawingml/2006/main" xmlns:r="http://schemas.openxmlformats.org/officeDocument/2006/relationships" xmlns:p="http://schemas.openxmlformats.org/presentationml/2006/main">
+  <p:cSld>
+    <p:spTree>
+      <p:nvGrpSpPr>
+        <p:cNvPr id="1" name=""/>
+        <p:cNvGrpSpPr/>
+        <p:nvPr/>
+      </p:nvGrpSpPr>
+      <p:grpSpPr>
+        <a:xfrm>
+          <a:off x="0" y="0"/>
+          <a:ext cx="0" cy="0"/>
+          <a:chOff x="0" y="0"/>
+          <a:chExt cx="0" cy="0"/>
+        </a:xfrm>
+      </p:grpSpPr>
+      <p:pic>
+        <p:nvPicPr>
+          <p:cNvPr id="6" name="Image 5"/>
+          <p:cNvPicPr>
+            <a:picLocks noChangeAspect="1"/>
+          </p:cNvPicPr>
+          <p:nvPr/>
+        </p:nvPicPr>
+        <p:blipFill>
+          <a:blip r:embed="rId2"/>
+          <a:stretch>
+            <a:fillRect/>
+          </a:stretch>
+        </p:blipFill>
+        <p:spPr>
+          <a:xfrm>
+            <a:off x="1652787" y="3377613"/>
+            <a:ext cx="8774238" cy="2388717"/>
+          </a:xfrm>
+          <a:prstGeom prst="rect">
+            <a:avLst/>
+          </a:prstGeom>
+        </p:spPr>
+      </p:pic>
+      <p:sp>
+        <p:nvSpPr>
+          <p:cNvPr id="2" name="Titre 1"/>
+          <p:cNvSpPr>
+            <a:spLocks noGrp="1"/>
+          </p:cNvSpPr>
+          <p:nvPr>
+            <p:ph type="title"/>
+          </p:nvPr>
+        </p:nvSpPr>
+        <p:spPr/>
+        <p:txBody>
+          <a:bodyPr/>
+          <a:lstStyle/>
+          <a:p>
+            <a:r>
+              <a:rPr lang="fr-FR" dirty="0" err="1" smtClean="0"/>
+              <a:t>Why</a:t>
+            </a:r>
+            <a:r>
+              <a:rPr lang="fr-FR" dirty="0" smtClean="0"/>
+              <a:t> </a:t>
+            </a:r>
+            <a:r>
+              <a:rPr lang="fr-FR" dirty="0" err="1" smtClean="0"/>
+              <a:t>is</a:t>
+            </a:r>
+            <a:r>
+              <a:rPr lang="fr-FR" dirty="0" smtClean="0"/>
+              <a:t> </a:t>
+            </a:r>
+            <a:r>
+              <a:rPr lang="fr-FR" dirty="0" err="1" smtClean="0"/>
+              <a:t>MLOps</a:t>
+            </a:r>
+            <a:r>
+              <a:rPr lang="fr-FR" dirty="0" smtClean="0"/>
+              <a:t> </a:t>
+            </a:r>
+            <a:r>
+              <a:rPr lang="fr-FR" dirty="0" err="1" smtClean="0"/>
+              <a:t>getting</a:t>
+            </a:r>
+            <a:r>
+              <a:rPr lang="fr-FR" dirty="0" smtClean="0"/>
+              <a:t> more and more important ?</a:t>
+            </a:r>
+            <a:endParaRPr lang="fr-FR" dirty="0"/>
+          </a:p>
+        </p:txBody>
+      </p:sp>
+      <p:sp>
+        <p:nvSpPr>
+          <p:cNvPr id="3" name="Espace réservé du texte 2"/>
+          <p:cNvSpPr>
+            <a:spLocks noGrp="1"/>
+          </p:cNvSpPr>
+          <p:nvPr>
+            <p:ph type="body" sz="quarter" idx="14"/>
+          </p:nvPr>
+        </p:nvSpPr>
+        <p:spPr>
+          <a:xfrm>
+            <a:off x="471288" y="1496119"/>
+            <a:ext cx="11137237" cy="4467225"/>
+          </a:xfrm>
+        </p:spPr>
+        <p:txBody>
+          <a:bodyPr/>
+          <a:lstStyle/>
+          <a:p>
+            <a:pPr marL="0" indent="0">
+              <a:buNone/>
+            </a:pPr>
+            <a:r>
+              <a:rPr lang="en-US" b="1" dirty="0"/>
+              <a:t>The benefits of AI </a:t>
+            </a:r>
+            <a:r>
+              <a:rPr lang="en-US" dirty="0"/>
+              <a:t>and ML </a:t>
+            </a:r>
+            <a:r>
+              <a:rPr lang="en-US" b="1" dirty="0"/>
+              <a:t>no longer need to be proven</a:t>
+            </a:r>
+            <a:r>
+              <a:rPr lang="en-US" dirty="0"/>
+              <a:t>, especially </a:t>
+            </a:r>
+            <a:r>
+              <a:rPr lang="en-US" b="1" dirty="0"/>
+              <a:t>with the boom of Generative AI</a:t>
+            </a:r>
+            <a:r>
+              <a:rPr lang="en-US" dirty="0"/>
+              <a:t>. The launch of </a:t>
+            </a:r>
+            <a:r>
+              <a:rPr lang="en-US" dirty="0" err="1"/>
+              <a:t>ChatGPT</a:t>
+            </a:r>
+            <a:r>
+              <a:rPr lang="en-US" dirty="0"/>
+              <a:t> in November 2022 has made the public understand, perhaps for the first time, the potential of </a:t>
+            </a:r>
+            <a:r>
+              <a:rPr lang="en-US" dirty="0" smtClean="0"/>
+              <a:t>AI</a:t>
+            </a:r>
+            <a:r>
+              <a:rPr lang="en-US" dirty="0"/>
+              <a:t/>
+            </a:r>
+            <a:br>
+              <a:rPr lang="en-US" dirty="0"/>
+            </a:br>
+            <a:r>
+              <a:rPr lang="en-US" dirty="0"/>
+              <a:t/>
+            </a:r>
+            <a:br>
+              <a:rPr lang="en-US" dirty="0"/>
+            </a:br>
+            <a:r>
+              <a:rPr lang="en-US" dirty="0" smtClean="0">
+                <a:sym typeface="Wingdings" panose="05000000000000000000" pitchFamily="2" charset="2"/>
+              </a:rPr>
+              <a:t> </a:t>
+            </a:r>
+            <a:r>
+              <a:rPr lang="en-US" dirty="0" smtClean="0"/>
+              <a:t>Companies </a:t>
+            </a:r>
+            <a:r>
+              <a:rPr lang="en-US" dirty="0"/>
+              <a:t>want to </a:t>
+            </a:r>
+            <a:r>
+              <a:rPr lang="en-US" b="1" dirty="0"/>
+              <a:t>move AI solutions from the POC (Proof of Concept) stage to the production </a:t>
+            </a:r>
+            <a:r>
+              <a:rPr lang="en-US" b="1" dirty="0" smtClean="0"/>
+              <a:t>stage</a:t>
+            </a:r>
+            <a:r>
+              <a:rPr lang="en-US" b="1" dirty="0"/>
+              <a:t/>
+            </a:r>
+            <a:br>
+              <a:rPr lang="en-US" b="1" dirty="0"/>
+            </a:br>
+            <a:r>
+              <a:rPr lang="en-US" dirty="0"/>
+              <a:t/>
+            </a:r>
+            <a:br>
+              <a:rPr lang="en-US" dirty="0"/>
+            </a:br>
+            <a:r>
+              <a:rPr lang="en-US" dirty="0"/>
+              <a:t>Below is the trend of searches for the "</a:t>
+            </a:r>
+            <a:r>
+              <a:rPr lang="en-US" dirty="0" err="1"/>
+              <a:t>MLOps</a:t>
+            </a:r>
+            <a:r>
+              <a:rPr lang="en-US" dirty="0"/>
+              <a:t>" keyword on </a:t>
+            </a:r>
+            <a:r>
+              <a:rPr lang="en-US" dirty="0" smtClean="0"/>
+              <a:t>Google</a:t>
+            </a:r>
+            <a:endParaRPr lang="fr-FR" dirty="0" smtClean="0"/>
+          </a:p>
+        </p:txBody>
+      </p:sp>
+      <p:sp>
+        <p:nvSpPr>
+          <p:cNvPr id="4" name="Espace réservé du numéro de diapositive 3"/>
+          <p:cNvSpPr>
+            <a:spLocks noGrp="1"/>
+          </p:cNvSpPr>
+          <p:nvPr>
+            <p:ph type="sldNum" sz="quarter" idx="4"/>
+          </p:nvPr>
+        </p:nvSpPr>
+        <p:spPr/>
+        <p:txBody>
+          <a:bodyPr/>
+          <a:lstStyle/>
+          <a:p>
+            <a:pPr>
+              <a:defRPr/>
+            </a:pPr>
+            <a:fld id="{F4FEB08F-923E-484A-9FC5-0AA7BDA29BD6}" type="slidenum">
+              <a:rPr lang="fr-FR" smtClean="0"/>
+              <a:pPr>
+                <a:defRPr/>
+              </a:pPr>
+              <a:t>6</a:t>
+            </a:fld>
+            <a:endParaRPr lang="fr-FR" dirty="0"/>
+          </a:p>
+        </p:txBody>
+      </p:sp>
+      <p:sp>
+        <p:nvSpPr>
+          <p:cNvPr id="7" name="Espace réservé du pied de page 4"/>
+          <p:cNvSpPr>
+            <a:spLocks noGrp="1"/>
+          </p:cNvSpPr>
+          <p:nvPr>
+            <p:ph type="ftr" sz="quarter" idx="3"/>
+          </p:nvPr>
+        </p:nvSpPr>
+        <p:spPr>
+          <a:xfrm>
+            <a:off x="511908" y="6406728"/>
+            <a:ext cx="5672016" cy="365125"/>
+          </a:xfrm>
+        </p:spPr>
+        <p:txBody>
+          <a:bodyPr/>
+          <a:lstStyle/>
+          <a:p>
+            <a:r>
+              <a:rPr lang="fr-FR" dirty="0" smtClean="0"/>
+              <a:t>2025 | ©</a:t>
+            </a:r>
+            <a:r>
+              <a:rPr lang="fr-FR" dirty="0" err="1" smtClean="0"/>
+              <a:t>HeadMind</a:t>
+            </a:r>
+            <a:r>
+              <a:rPr lang="fr-FR" dirty="0" smtClean="0"/>
+              <a:t> </a:t>
+            </a:r>
+            <a:r>
+              <a:rPr lang="fr-FR" dirty="0" err="1" smtClean="0"/>
+              <a:t>Partners</a:t>
+            </a:r>
+            <a:r>
+              <a:rPr lang="fr-FR" dirty="0" smtClean="0"/>
+              <a:t> AI &amp; </a:t>
+            </a:r>
+            <a:r>
+              <a:rPr lang="fr-FR" dirty="0" err="1" smtClean="0"/>
+              <a:t>Blockchain</a:t>
+            </a:r>
+            <a:endParaRPr lang="fr-FR" dirty="0"/>
+          </a:p>
+        </p:txBody>
+      </p:sp>
+    </p:spTree>
+    <p:extLst>
+      <p:ext uri="{BB962C8B-B14F-4D97-AF65-F5344CB8AC3E}">
+        <p14:creationId xmlns:p14="http://schemas.microsoft.com/office/powerpoint/2010/main" val="1061338067"/>
       </p:ext>
     </p:extLst>
   </p:cSld>
